--- a/docs/voc_architecture_deck.pptx
+++ b/docs/voc_architecture_deck.pptx
@@ -6801,7 +6801,7 @@
                 </a:solidFill>
                 <a:latin typeface="Segoe UI"/>
               </a:rPr>
-              <a:t>DERIVED  ·  REBUILT IN SECONDS, NEVER PROTECTED</a:t>
+              <a:t>DERIVED  ·  REBUILT IN SECONDS</a:t>
             </a:r>
           </a:p>
         </p:txBody>
@@ -9573,7 +9573,7 @@
                 </a:solidFill>
                 <a:latin typeface="Segoe UI"/>
               </a:rPr>
-              <a:t>Totals, calls per month, the top contact reasons with their change versus </a:t>
+              <a:t>Totals, volume by month, top reasons and themes, the sentiment split</a:t>
             </a:r>
           </a:p>
         </p:txBody>
@@ -9692,7 +9692,7 @@
                 </a:solidFill>
                 <a:latin typeface="Segoe UI"/>
               </a:rPr>
-              <a:t>Contact reasons ranked with counts, shares, change versus the previous per</a:t>
+              <a:t>Reasons ranked, with change on the previous period and the customer's words</a:t>
             </a:r>
           </a:p>
         </p:txBody>
@@ -9811,7 +9811,7 @@
                 </a:solidFill>
                 <a:latin typeface="Segoe UI"/>
               </a:rPr>
-              <a:t>Themes ranked by calls, negative mass, positive mass, emerging score or nu</a:t>
+              <a:t>Themes ranked by calls, negative mass, emerging score or wordings</a:t>
             </a:r>
           </a:p>
         </p:txBody>
@@ -9930,7 +9930,7 @@
                 </a:solidFill>
                 <a:latin typeface="Segoe UI"/>
               </a:rPr>
-              <a:t>One theme in depth: definition, root cause, the distinct wordings customer</a:t>
+              <a:t>One theme in full: definition, cause, every distinct wording, its weekly series</a:t>
             </a:r>
           </a:p>
         </p:txBody>
@@ -10049,7 +10049,7 @@
                 </a:solidFill>
                 <a:latin typeface="Segoe UI"/>
               </a:rPr>
-              <a:t>Weekly or monthly series for up to six themes or contact reasons, with the</a:t>
+              <a:t>Weekly or monthly series for up to six themes or reasons</a:t>
             </a:r>
           </a:p>
         </p:txBody>
@@ -10168,7 +10168,7 @@
                 </a:solidFill>
                 <a:latin typeface="Segoe UI"/>
               </a:rPr>
-              <a:t>Themes that are new, emerging, growing or fading at the as-of week, with t</a:t>
+              <a:t>What is new, emerging, growing or fading at a chosen as-of week</a:t>
             </a:r>
           </a:p>
         </p:txBody>
@@ -10287,7 +10287,7 @@
                 </a:solidFill>
                 <a:latin typeface="Segoe UI"/>
               </a:rPr>
-              <a:t>What drives negative or positive sentiment, grouped by theme, driver categ</a:t>
+              <a:t>What drives sentiment, with the specific triggers and two verified quotes</a:t>
             </a:r>
           </a:p>
         </p:txBody>
@@ -10406,7 +10406,7 @@
                 </a:solidFill>
                 <a:latin typeface="Segoe UI"/>
               </a:rPr>
-              <a:t>How one entity (or all calls) differs by product, channel, region group, r</a:t>
+              <a:t>One entity by product, channel, region or segment, with lift and suppression</a:t>
             </a:r>
           </a:p>
         </p:txBody>
@@ -10525,7 +10525,7 @@
                 </a:solidFill>
                 <a:latin typeface="Segoe UI"/>
               </a:rPr>
-              <a:t>Two filtered scopes side by side (two periods, two products, two segments)</a:t>
+              <a:t>Two filtered scopes side by side, and what differs most between them</a:t>
             </a:r>
           </a:p>
         </p:txBody>
@@ -10644,7 +10644,7 @@
                 </a:solidFill>
                 <a:latin typeface="Segoe UI"/>
               </a:rPr>
-              <a:t>Verified verbatim customer statements for a theme, contact reason, driver </a:t>
+              <a:t>Verified verbatim statements, spread across months and products</a:t>
             </a:r>
           </a:p>
         </p:txBody>
@@ -10763,7 +10763,7 @@
                 </a:solidFill>
                 <a:latin typeface="Segoe UI"/>
               </a:rPr>
-              <a:t>Full-text search over the contact texts and the extracted issue statements</a:t>
+              <a:t>Full-text search over the contact texts and the extracted statements</a:t>
             </a:r>
           </a:p>
         </p:txBody>
@@ -10882,7 +10882,7 @@
                 </a:solidFill>
                 <a:latin typeface="Segoe UI"/>
               </a:rPr>
-              <a:t>One contact in full: the customer's text, the metadata, everything extract</a:t>
+              <a:t>One contact in full: text, metadata, everything extracted, its themes</a:t>
             </a:r>
           </a:p>
         </p:txBody>

--- a/docs/voc_architecture_deck.pptx
+++ b/docs/voc_architecture_deck.pptx
@@ -3268,7 +3268,7 @@
                 </a:solidFill>
                 <a:latin typeface="Segoe UI"/>
               </a:rPr>
-              <a:t>10,548 lines across 11 modules  ·  13 test files  ·  no build step, no external services</a:t>
+              <a:t>11,016 lines across 11 modules  ·  14 test files  ·  no build step, no external services</a:t>
             </a:r>
           </a:p>
         </p:txBody>
@@ -3847,7 +3847,7 @@
                 </a:solidFill>
                 <a:latin typeface="Segoe UI"/>
               </a:rPr>
-              <a:t>726</a:t>
+              <a:t>728</a:t>
             </a:r>
           </a:p>
         </p:txBody>
@@ -4008,7 +4008,7 @@
                 </a:solidFill>
                 <a:latin typeface="Segoe UI"/>
               </a:rPr>
-              <a:t>452</a:t>
+              <a:t>653</a:t>
             </a:r>
           </a:p>
         </p:txBody>
@@ -4169,7 +4169,7 @@
                 </a:solidFill>
                 <a:latin typeface="Segoe UI"/>
               </a:rPr>
-              <a:t>757</a:t>
+              <a:t>890</a:t>
             </a:r>
           </a:p>
         </p:txBody>
@@ -4330,7 +4330,7 @@
                 </a:solidFill>
                 <a:latin typeface="Segoe UI"/>
               </a:rPr>
-              <a:t>798</a:t>
+              <a:t>802</a:t>
             </a:r>
           </a:p>
         </p:txBody>
@@ -4491,7 +4491,7 @@
                 </a:solidFill>
                 <a:latin typeface="Segoe UI"/>
               </a:rPr>
-              <a:t>1,387</a:t>
+              <a:t>1,425</a:t>
             </a:r>
           </a:p>
         </p:txBody>
@@ -5223,7 +5223,7 @@
                 </a:solidFill>
                 <a:latin typeface="Segoe UI"/>
               </a:rPr>
-              <a:t>417</a:t>
+              <a:t>435</a:t>
             </a:r>
           </a:p>
         </p:txBody>
@@ -5384,7 +5384,7 @@
                 </a:solidFill>
                 <a:latin typeface="Segoe UI"/>
               </a:rPr>
-              <a:t>1,454</a:t>
+              <a:t>1,526</a:t>
             </a:r>
           </a:p>
         </p:txBody>
@@ -5461,7 +5461,7 @@
                 </a:solidFill>
                 <a:latin typeface="Segoe UI"/>
               </a:rPr>
-              <a:t>10,548 lines in all. The two highlighted modules are where the interesting decisions live: what the data means, and what may be shown.</a:t>
+              <a:t>11,016 lines in all. The two highlighted modules are where the interesting decisions live: what the data means, and what may be shown.</a:t>
             </a:r>
           </a:p>
         </p:txBody>
@@ -11909,7 +11909,7 @@
                 </a:solidFill>
                 <a:latin typeface="Segoe UI"/>
               </a:rPr>
-              <a:t>4,425</a:t>
+              <a:t>5,425</a:t>
             </a:r>
           </a:p>
           <a:p>
@@ -11990,7 +11990,7 @@
                 </a:solidFill>
                 <a:latin typeface="Segoe UI"/>
               </a:rPr>
-              <a:t>79</a:t>
+              <a:t>158</a:t>
             </a:r>
           </a:p>
           <a:p>
@@ -12071,7 +12071,7 @@
                 </a:solidFill>
                 <a:latin typeface="Segoe UI"/>
               </a:rPr>
-              <a:t>63</a:t>
+              <a:t>139</a:t>
             </a:r>
           </a:p>
           <a:p>
@@ -12152,7 +12152,7 @@
                 </a:solidFill>
                 <a:latin typeface="Segoe UI"/>
               </a:rPr>
-              <a:t>13</a:t>
+              <a:t>68</a:t>
             </a:r>
           </a:p>
           <a:p>
@@ -12233,7 +12233,7 @@
                 </a:solidFill>
                 <a:latin typeface="Segoe UI"/>
               </a:rPr>
-              <a:t>8</a:t>
+              <a:t>17</a:t>
             </a:r>
           </a:p>
           <a:p>
@@ -12294,7 +12294,7 @@
                 </a:solidFill>
                 <a:latin typeface="Segoe UI"/>
               </a:rPr>
-              <a:t>This is how all 4,425 contacts were read and all 5,827 statements grouped, on a machine with no key.</a:t>
+              <a:t>This is how all 5,425 contacts were read and all 7,417 statements grouped, on a machine with no key.</a:t>
             </a:r>
           </a:p>
         </p:txBody>

--- a/docs/voc_architecture_deck.pptx
+++ b/docs/voc_architecture_deck.pptx
@@ -11990,7 +11990,7 @@
                 </a:solidFill>
                 <a:latin typeface="Segoe UI"/>
               </a:rPr>
-              <a:t>158</a:t>
+              <a:t>191</a:t>
             </a:r>
           </a:p>
           <a:p>
@@ -12233,7 +12233,7 @@
                 </a:solidFill>
                 <a:latin typeface="Segoe UI"/>
               </a:rPr>
-              <a:t>17</a:t>
+              <a:t>25</a:t>
             </a:r>
           </a:p>
           <a:p>
